--- a/presentacion/Jenga_de_Cultura_General.pptx
+++ b/presentacion/Jenga_de_Cultura_General.pptx
@@ -2230,7 +2230,7 @@
       </p:sp>
       <p:pic>
         <p:nvPicPr>
-          <p:cNvPr id="11" name="Image 0" descr="C:\Users\joaqu\Juego-Nietardo\presentacion\img\bloques.png">    </p:cNvPr>
+          <p:cNvPr id="11" name="Image 0" descr="Tres bloques del juego, uno de cada nivel, con una, dos y tres ranuras">    </p:cNvPr>
           <p:cNvPicPr>
             <a:picLocks noChangeAspect="1"/>
           </p:cNvPicPr>
@@ -2357,7 +2357,7 @@
       </p:sp>
       <p:pic>
         <p:nvPicPr>
-          <p:cNvPr id="4" name="Image 0" descr="C:\Users\joaqu\Juego-Nietardo\presentacion\img\piezas.png">    </p:cNvPr>
+          <p:cNvPr id="4" name="Image 0" descr="Base de la torre y porta-cartas impresos en 3D">    </p:cNvPr>
           <p:cNvPicPr>
             <a:picLocks noChangeAspect="1"/>
           </p:cNvPicPr>
@@ -4042,7 +4042,7 @@
       </p:sp>
       <p:pic>
         <p:nvPicPr>
-          <p:cNvPr id="7" name="Image 0" descr="C:\Users\joaqu\Juego-Nietardo\presentacion\img\bloques.png">    </p:cNvPr>
+          <p:cNvPr id="7" name="Image 0" descr="Tres bloques del juego, uno de cada nivel, con una, dos y tres ranuras">    </p:cNvPr>
           <p:cNvPicPr>
             <a:picLocks noChangeAspect="1"/>
           </p:cNvPicPr>
@@ -5217,7 +5217,7 @@
       </p:sp>
       <p:pic>
         <p:nvPicPr>
-          <p:cNvPr id="4" name="Image 0" descr="C:\Users\joaqu\Juego-Nietardo\presentacion\img\bloques.png">    </p:cNvPr>
+          <p:cNvPr id="4" name="Image 0" descr="Tres bloques del juego, uno de cada nivel, con una, dos y tres ranuras">    </p:cNvPr>
           <p:cNvPicPr>
             <a:picLocks noChangeAspect="1"/>
           </p:cNvPicPr>
@@ -9384,7 +9384,7 @@
       </p:sp>
       <p:pic>
         <p:nvPicPr>
-          <p:cNvPr id="4" name="Image 0" descr="C:\Users\joaqu\Juego-Nietardo\presentacion\img\cartas.png">    </p:cNvPr>
+          <p:cNvPr id="4" name="Image 0" descr="Tres cartas de preguntas, una de cada nivel">    </p:cNvPr>
           <p:cNvPicPr>
             <a:picLocks noChangeAspect="1"/>
           </p:cNvPicPr>

--- a/presentacion/Jenga_de_Cultura_General.pptx
+++ b/presentacion/Jenga_de_Cultura_General.pptx
@@ -1305,7 +1305,7 @@
           <a:p>
             <a:r>
               <a:rPr lang="en-US" dirty="0"/>
-              <a:t>Esta es la regla que hace que el juego tenga tensión: no alcanza con saber, hay que administrar el riesgo hasta el final.</a:t>
+              <a:t>Tres reglas que se combinan: el nivel te da los puntos, errar te los quita y el bono te empuja a salir de tu materia favorita. Y arriba de todo, la torre.</a:t>
             </a:r>
             <a:endParaRPr lang="en-US" dirty="0"/>
           </a:p>
@@ -7562,7 +7562,7 @@
                 <a:ea typeface="Calibri" pitchFamily="34" charset="-122"/>
                 <a:cs typeface="Calibri" pitchFamily="34" charset="-120"/>
               </a:rPr>
-              <a:t>Acertás: 1, 2 o 3 puntos. Errás: 0. El bloque va arriba igual.</a:t>
+              <a:t>Acertás: 1, 2 o 3 puntos. Errás: restás 1. El bloque va arriba igual.</a:t>
             </a:r>
             <a:endParaRPr lang="en-US" sz="1350" dirty="0"/>
           </a:p>
@@ -7858,12 +7858,12 @@
         </p:nvSpPr>
         <p:spPr>
           <a:xfrm>
-            <a:off x="640080" y="2103120"/>
-            <a:ext cx="3474720" cy="1920240"/>
+            <a:off x="640080" y="2057400"/>
+            <a:ext cx="3474720" cy="1783080"/>
           </a:xfrm>
           <a:prstGeom prst="roundRect">
             <a:avLst>
-              <a:gd name="adj" fmla="val 2381"/>
+              <a:gd name="adj" fmla="val 2564"/>
             </a:avLst>
           </a:prstGeom>
           <a:solidFill>
@@ -8002,7 +8002,7 @@
         </p:nvSpPr>
         <p:spPr>
           <a:xfrm>
-            <a:off x="868680" y="3429000"/>
+            <a:off x="868680" y="3310128"/>
             <a:ext cx="3017520" cy="365760"/>
           </a:xfrm>
           <a:prstGeom prst="rect">
@@ -8041,12 +8041,12 @@
         </p:nvSpPr>
         <p:spPr>
           <a:xfrm>
-            <a:off x="4343400" y="2103120"/>
-            <a:ext cx="3474720" cy="1920240"/>
+            <a:off x="4343400" y="2057400"/>
+            <a:ext cx="3474720" cy="1783080"/>
           </a:xfrm>
           <a:prstGeom prst="roundRect">
             <a:avLst>
-              <a:gd name="adj" fmla="val 2381"/>
+              <a:gd name="adj" fmla="val 2564"/>
             </a:avLst>
           </a:prstGeom>
           <a:solidFill>
@@ -8185,7 +8185,7 @@
         </p:nvSpPr>
         <p:spPr>
           <a:xfrm>
-            <a:off x="4572000" y="3429000"/>
+            <a:off x="4572000" y="3310128"/>
             <a:ext cx="3017520" cy="365760"/>
           </a:xfrm>
           <a:prstGeom prst="rect">
@@ -8224,12 +8224,12 @@
         </p:nvSpPr>
         <p:spPr>
           <a:xfrm>
-            <a:off x="8046720" y="2103120"/>
-            <a:ext cx="3474720" cy="1920240"/>
+            <a:off x="8046720" y="2057400"/>
+            <a:ext cx="3474720" cy="1783080"/>
           </a:xfrm>
           <a:prstGeom prst="roundRect">
             <a:avLst>
-              <a:gd name="adj" fmla="val 2381"/>
+              <a:gd name="adj" fmla="val 2564"/>
             </a:avLst>
           </a:prstGeom>
           <a:solidFill>
@@ -8368,7 +8368,7 @@
         </p:nvSpPr>
         <p:spPr>
           <a:xfrm>
-            <a:off x="8275320" y="3429000"/>
+            <a:off x="8275320" y="3310128"/>
             <a:ext cx="3017520" cy="365760"/>
           </a:xfrm>
           <a:prstGeom prst="rect">
@@ -8407,12 +8407,117 @@
         </p:nvSpPr>
         <p:spPr>
           <a:xfrm>
-            <a:off x="640080" y="4434840"/>
-            <a:ext cx="10881360" cy="1600200"/>
+            <a:off x="640080" y="4206240"/>
+            <a:ext cx="5486400" cy="1051560"/>
           </a:xfrm>
           <a:prstGeom prst="roundRect">
             <a:avLst>
-              <a:gd name="adj" fmla="val 2857"/>
+              <a:gd name="adj" fmla="val 4348"/>
+            </a:avLst>
+          </a:prstGeom>
+          <a:solidFill>
+            <a:srgbClr val="2A3247"/>
+          </a:solidFill>
+          <a:ln w="12700">
+            <a:solidFill>
+              <a:srgbClr val="2A3247"/>
+            </a:solidFill>
+            <a:prstDash val="solid"/>
+          </a:ln>
+        </p:spPr>
+      </p:sp>
+      <p:sp>
+        <p:nvSpPr>
+          <p:cNvPr id="20" name="Text 18"/>
+          <p:cNvSpPr txBox="1"/>
+          <p:nvPr/>
+        </p:nvSpPr>
+        <p:spPr>
+          <a:xfrm>
+            <a:off x="960120" y="4370832"/>
+            <a:ext cx="4846320" cy="320040"/>
+          </a:xfrm>
+          <a:prstGeom prst="rect">
+            <a:avLst/>
+          </a:prstGeom>
+          <a:noFill/>
+          <a:ln/>
+        </p:spPr>
+        <p:txBody>
+          <a:bodyPr wrap="square" lIns="0" tIns="0" rIns="0" bIns="0" rtlCol="0" anchor="ctr"/>
+          <a:lstStyle/>
+          <a:p>
+            <a:pPr indent="0" marL="0">
+              <a:buNone/>
+            </a:pPr>
+            <a:r>
+              <a:rPr lang="en-US" sz="1500" b="1" dirty="0">
+                <a:solidFill>
+                  <a:srgbClr val="FFFFFF"/>
+                </a:solidFill>
+                <a:latin typeface="Calibri" pitchFamily="34" charset="0"/>
+                <a:ea typeface="Calibri" pitchFamily="34" charset="-122"/>
+                <a:cs typeface="Calibri" pitchFamily="34" charset="-120"/>
+              </a:rPr>
+              <a:t>Si errás: −1 punto</a:t>
+            </a:r>
+            <a:endParaRPr lang="en-US" sz="1500" dirty="0"/>
+          </a:p>
+        </p:txBody>
+      </p:sp>
+      <p:sp>
+        <p:nvSpPr>
+          <p:cNvPr id="21" name="Text 19"/>
+          <p:cNvSpPr txBox="1"/>
+          <p:nvPr/>
+        </p:nvSpPr>
+        <p:spPr>
+          <a:xfrm>
+            <a:off x="960120" y="4700016"/>
+            <a:ext cx="4846320" cy="320040"/>
+          </a:xfrm>
+          <a:prstGeom prst="rect">
+            <a:avLst/>
+          </a:prstGeom>
+          <a:noFill/>
+          <a:ln/>
+        </p:spPr>
+        <p:txBody>
+          <a:bodyPr wrap="square" lIns="0" tIns="0" rIns="0" bIns="0" rtlCol="0" anchor="ctr"/>
+          <a:lstStyle/>
+          <a:p>
+            <a:pPr indent="0" marL="0">
+              <a:buNone/>
+            </a:pPr>
+            <a:r>
+              <a:rPr lang="en-US" sz="1250" dirty="0">
+                <a:solidFill>
+                  <a:srgbClr val="8A90A0"/>
+                </a:solidFill>
+                <a:latin typeface="Calibri" pitchFamily="34" charset="0"/>
+                <a:ea typeface="Calibri" pitchFamily="34" charset="-122"/>
+                <a:cs typeface="Calibri" pitchFamily="34" charset="-120"/>
+              </a:rPr>
+              <a:t>Nunca bajás de cero. Arriesgar ahora cuesta.</a:t>
+            </a:r>
+            <a:endParaRPr lang="en-US" sz="1250" dirty="0"/>
+          </a:p>
+        </p:txBody>
+      </p:sp>
+      <p:sp>
+        <p:nvSpPr>
+          <p:cNvPr id="22" name="Shape 20"/>
+          <p:cNvSpPr/>
+          <p:nvPr/>
+        </p:nvSpPr>
+        <p:spPr>
+          <a:xfrm>
+            <a:off x="6355080" y="4206240"/>
+            <a:ext cx="5166360" cy="1051560"/>
+          </a:xfrm>
+          <a:prstGeom prst="roundRect">
+            <a:avLst>
+              <a:gd name="adj" fmla="val 4348"/>
             </a:avLst>
           </a:prstGeom>
           <a:solidFill>
@@ -8428,13 +8533,118 @@
       </p:sp>
       <p:sp>
         <p:nvSpPr>
-          <p:cNvPr id="20" name="Text 18"/>
-          <p:cNvSpPr txBox="1"/>
-          <p:nvPr/>
-        </p:nvSpPr>
-        <p:spPr>
-          <a:xfrm>
-            <a:off x="1051560" y="4663440"/>
+          <p:cNvPr id="23" name="Text 21"/>
+          <p:cNvSpPr txBox="1"/>
+          <p:nvPr/>
+        </p:nvSpPr>
+        <p:spPr>
+          <a:xfrm>
+            <a:off x="6675120" y="4370832"/>
+            <a:ext cx="4572000" cy="320040"/>
+          </a:xfrm>
+          <a:prstGeom prst="rect">
+            <a:avLst/>
+          </a:prstGeom>
+          <a:noFill/>
+          <a:ln/>
+        </p:spPr>
+        <p:txBody>
+          <a:bodyPr wrap="square" lIns="0" tIns="0" rIns="0" bIns="0" rtlCol="0" anchor="ctr"/>
+          <a:lstStyle/>
+          <a:p>
+            <a:pPr indent="0" marL="0">
+              <a:buNone/>
+            </a:pPr>
+            <a:r>
+              <a:rPr lang="en-US" sz="1500" b="1" dirty="0">
+                <a:solidFill>
+                  <a:srgbClr val="FF8A6B"/>
+                </a:solidFill>
+                <a:latin typeface="Calibri" pitchFamily="34" charset="0"/>
+                <a:ea typeface="Calibri" pitchFamily="34" charset="-122"/>
+                <a:cs typeface="Calibri" pitchFamily="34" charset="-120"/>
+              </a:rPr>
+              <a:t>Bono de cultura general: +3</a:t>
+            </a:r>
+            <a:endParaRPr lang="en-US" sz="1500" dirty="0"/>
+          </a:p>
+        </p:txBody>
+      </p:sp>
+      <p:sp>
+        <p:nvSpPr>
+          <p:cNvPr id="24" name="Text 22"/>
+          <p:cNvSpPr txBox="1"/>
+          <p:nvPr/>
+        </p:nvSpPr>
+        <p:spPr>
+          <a:xfrm>
+            <a:off x="6675120" y="4700016"/>
+            <a:ext cx="4572000" cy="320040"/>
+          </a:xfrm>
+          <a:prstGeom prst="rect">
+            <a:avLst/>
+          </a:prstGeom>
+          <a:noFill/>
+          <a:ln/>
+        </p:spPr>
+        <p:txBody>
+          <a:bodyPr wrap="square" lIns="0" tIns="0" rIns="0" bIns="0" rtlCol="0" anchor="ctr"/>
+          <a:lstStyle/>
+          <a:p>
+            <a:pPr indent="0" marL="0">
+              <a:buNone/>
+            </a:pPr>
+            <a:r>
+              <a:rPr lang="en-US" sz="1250" dirty="0">
+                <a:solidFill>
+                  <a:srgbClr val="E4D8D4"/>
+                </a:solidFill>
+                <a:latin typeface="Calibri" pitchFamily="34" charset="0"/>
+                <a:ea typeface="Calibri" pitchFamily="34" charset="-122"/>
+                <a:cs typeface="Calibri" pitchFamily="34" charset="-120"/>
+              </a:rPr>
+              <a:t>Al acertar una carta de cada una de las 5 materias.</a:t>
+            </a:r>
+            <a:endParaRPr lang="en-US" sz="1250" dirty="0"/>
+          </a:p>
+        </p:txBody>
+      </p:sp>
+      <p:sp>
+        <p:nvSpPr>
+          <p:cNvPr id="25" name="Shape 23"/>
+          <p:cNvSpPr/>
+          <p:nvPr/>
+        </p:nvSpPr>
+        <p:spPr>
+          <a:xfrm>
+            <a:off x="640080" y="5532120"/>
+            <a:ext cx="10881360" cy="868680"/>
+          </a:xfrm>
+          <a:prstGeom prst="roundRect">
+            <a:avLst>
+              <a:gd name="adj" fmla="val 5263"/>
+            </a:avLst>
+          </a:prstGeom>
+          <a:solidFill>
+            <a:srgbClr val="3A2320"/>
+          </a:solidFill>
+          <a:ln w="12700">
+            <a:solidFill>
+              <a:srgbClr val="3A2320"/>
+            </a:solidFill>
+            <a:prstDash val="solid"/>
+          </a:ln>
+        </p:spPr>
+      </p:sp>
+      <p:sp>
+        <p:nvSpPr>
+          <p:cNvPr id="26" name="Text 24"/>
+          <p:cNvSpPr txBox="1"/>
+          <p:nvPr/>
+        </p:nvSpPr>
+        <p:spPr>
+          <a:xfrm>
+            <a:off x="1051560" y="5742432"/>
             <a:ext cx="10058400" cy="457200"/>
           </a:xfrm>
           <a:prstGeom prst="rect">
@@ -8451,7 +8661,7 @@
               <a:buNone/>
             </a:pPr>
             <a:r>
-              <a:rPr lang="en-US" sz="2400" b="1" dirty="0">
+              <a:rPr lang="en-US" sz="2000" b="1" dirty="0">
                 <a:solidFill>
                   <a:srgbClr val="FF8A6B"/>
                 </a:solidFill>
@@ -8461,46 +8671,7 @@
               </a:rPr>
               <a:t>Si se cae la torre, el que la tiró pierde TODOS sus puntos.</a:t>
             </a:r>
-            <a:endParaRPr lang="en-US" sz="2400" dirty="0"/>
-          </a:p>
-        </p:txBody>
-      </p:sp>
-      <p:sp>
-        <p:nvSpPr>
-          <p:cNvPr id="21" name="Text 19"/>
-          <p:cNvSpPr txBox="1"/>
-          <p:nvPr/>
-        </p:nvSpPr>
-        <p:spPr>
-          <a:xfrm>
-            <a:off x="1051560" y="5212080"/>
-            <a:ext cx="10058400" cy="548640"/>
-          </a:xfrm>
-          <a:prstGeom prst="rect">
-            <a:avLst/>
-          </a:prstGeom>
-          <a:noFill/>
-          <a:ln/>
-        </p:spPr>
-        <p:txBody>
-          <a:bodyPr wrap="square" lIns="0" tIns="0" rIns="0" bIns="0" rtlCol="0" anchor="ctr"/>
-          <a:lstStyle/>
-          <a:p>
-            <a:pPr indent="0" marL="0">
-              <a:buNone/>
-            </a:pPr>
-            <a:r>
-              <a:rPr lang="en-US" sz="1500" dirty="0">
-                <a:solidFill>
-                  <a:srgbClr val="E4D8D4"/>
-                </a:solidFill>
-                <a:latin typeface="Calibri" pitchFamily="34" charset="0"/>
-                <a:ea typeface="Calibri" pitchFamily="34" charset="-122"/>
-                <a:cs typeface="Calibri" pitchFamily="34" charset="-120"/>
-              </a:rPr>
-              <a:t>Los demás conservan lo que sumaron y gana el que tenga más. Por eso conviene pensar dos veces antes de ir por el bloque de 3 puntos.</a:t>
-            </a:r>
-            <a:endParaRPr lang="en-US" sz="1500" dirty="0"/>
+            <a:endParaRPr lang="en-US" sz="2000" dirty="0"/>
           </a:p>
         </p:txBody>
       </p:sp>

--- a/presentacion/Jenga_de_Cultura_General.pptx
+++ b/presentacion/Jenga_de_Cultura_General.pptx
@@ -2451,7 +2451,7 @@
                 <a:ea typeface="Calibri" pitchFamily="34" charset="-122"/>
                 <a:cs typeface="Calibri" pitchFamily="34" charset="-120"/>
               </a:rPr>
-              <a:t>85 × 85 × 9 mm</a:t>
+              <a:t>86 × 86 × 10 mm</a:t>
             </a:r>
             <a:endParaRPr lang="en-US" sz="1350" dirty="0"/>
           </a:p>
@@ -2571,7 +2571,7 @@
                 <a:ea typeface="Calibri" pitchFamily="34" charset="-122"/>
                 <a:cs typeface="Calibri" pitchFamily="34" charset="-120"/>
               </a:rPr>
-              <a:t>81 × 109 × 22 mm</a:t>
+              <a:t>84 × 112 × 24 mm</a:t>
             </a:r>
             <a:endParaRPr lang="en-US" sz="1350" dirty="0"/>
           </a:p>
@@ -2613,7 +2613,7 @@
                 <a:ea typeface="Calibri" pitchFamily="34" charset="-122"/>
                 <a:cs typeface="Calibri" pitchFamily="34" charset="-120"/>
               </a:rPr>
-              <a:t>Bandeja para los mazos, con el frente bajo para sacar las cartas.</a:t>
+              <a:t>Bandeja para los mazos. El frente baja en curva, de 24 a 8 mm, para sacar las cartas con el pulgar.</a:t>
             </a:r>
             <a:endParaRPr lang="en-US" sz="1350" dirty="0"/>
           </a:p>

--- a/presentacion/Jenga_de_Cultura_General.pptx
+++ b/presentacion/Jenga_de_Cultura_General.pptx
@@ -861,7 +861,7 @@
           <a:p>
             <a:r>
               <a:rPr lang="en-US" dirty="0"/>
-              <a:t>Sin el −1, siempre convenía ir al bloque más difícil: arriesgar era gratis. Sin el bono, cada uno se quedaba cazando su propia materia. Las dos reglas salieron de probar el juego.</a:t>
+              <a:t>Sin el −1, siempre convenía ir al bloque más difícil que se pudiera alcanzar: arriesgar era gratis y los bloques de nivel 1 no los elegía nadie. La regla salió de probar el juego.</a:t>
             </a:r>
             <a:endParaRPr lang="en-US" dirty="0"/>
           </a:p>
@@ -4624,7 +4624,7 @@
                 <a:ea typeface="Cambria" pitchFamily="34" charset="-122"/>
                 <a:cs typeface="Cambria" pitchFamily="34" charset="-120"/>
               </a:rPr>
-              <a:t>Tres reglas que obligan a elegir</a:t>
+              <a:t>Cuánto suma y cuánto cuesta</a:t>
             </a:r>
             <a:endParaRPr lang="en-US" sz="4000" dirty="0"/>
           </a:p>
@@ -4639,7 +4639,7 @@
         <p:spPr>
           <a:xfrm>
             <a:off x="713232" y="2148840"/>
-            <a:ext cx="3383280" cy="2331720"/>
+            <a:ext cx="5257800" cy="2331720"/>
           </a:xfrm>
           <a:prstGeom prst="roundRect">
             <a:avLst>
@@ -4665,24 +4665,24 @@
         </p:nvSpPr>
         <p:spPr>
           <a:xfrm>
-            <a:off x="1005840" y="2395728"/>
-            <a:ext cx="2834640" cy="777240"/>
-          </a:xfrm>
-          <a:prstGeom prst="rect">
-            <a:avLst/>
-          </a:prstGeom>
-          <a:noFill/>
-          <a:ln/>
-        </p:spPr>
-        <p:txBody>
-          <a:bodyPr wrap="square" lIns="0" tIns="0" rIns="0" bIns="0" rtlCol="0" anchor="ctr"/>
-          <a:lstStyle/>
-          <a:p>
-            <a:pPr indent="0" marL="0">
-              <a:buNone/>
-            </a:pPr>
-            <a:r>
-              <a:rPr lang="en-US" sz="3000" b="1" dirty="0">
+            <a:off x="1078992" y="2395728"/>
+            <a:ext cx="4572000" cy="777240"/>
+          </a:xfrm>
+          <a:prstGeom prst="rect">
+            <a:avLst/>
+          </a:prstGeom>
+          <a:noFill/>
+          <a:ln/>
+        </p:spPr>
+        <p:txBody>
+          <a:bodyPr wrap="square" lIns="0" tIns="0" rIns="0" bIns="0" rtlCol="0" anchor="ctr"/>
+          <a:lstStyle/>
+          <a:p>
+            <a:pPr indent="0" marL="0">
+              <a:buNone/>
+            </a:pPr>
+            <a:r>
+              <a:rPr lang="en-US" sz="3400" b="1" dirty="0">
                 <a:solidFill>
                   <a:srgbClr val="FF8A6B"/>
                 </a:solidFill>
@@ -4692,7 +4692,7 @@
               </a:rPr>
               <a:t>1 · 2 · 3</a:t>
             </a:r>
-            <a:endParaRPr lang="en-US" sz="3000" dirty="0"/>
+            <a:endParaRPr lang="en-US" sz="3400" dirty="0"/>
           </a:p>
         </p:txBody>
       </p:sp>
@@ -4704,24 +4704,24 @@
         </p:nvSpPr>
         <p:spPr>
           <a:xfrm>
-            <a:off x="1005840" y="3291840"/>
-            <a:ext cx="2834640" cy="365760"/>
-          </a:xfrm>
-          <a:prstGeom prst="rect">
-            <a:avLst/>
-          </a:prstGeom>
-          <a:noFill/>
-          <a:ln/>
-        </p:spPr>
-        <p:txBody>
-          <a:bodyPr wrap="square" lIns="0" tIns="0" rIns="0" bIns="0" rtlCol="0" anchor="ctr"/>
-          <a:lstStyle/>
-          <a:p>
-            <a:pPr indent="0" marL="0">
-              <a:buNone/>
-            </a:pPr>
-            <a:r>
-              <a:rPr lang="en-US" sz="1600" b="1" dirty="0">
+            <a:off x="1078992" y="3291840"/>
+            <a:ext cx="4572000" cy="365760"/>
+          </a:xfrm>
+          <a:prstGeom prst="rect">
+            <a:avLst/>
+          </a:prstGeom>
+          <a:noFill/>
+          <a:ln/>
+        </p:spPr>
+        <p:txBody>
+          <a:bodyPr wrap="square" lIns="0" tIns="0" rIns="0" bIns="0" rtlCol="0" anchor="ctr"/>
+          <a:lstStyle/>
+          <a:p>
+            <a:pPr indent="0" marL="0">
+              <a:buNone/>
+            </a:pPr>
+            <a:r>
+              <a:rPr lang="en-US" sz="1700" b="1" dirty="0">
                 <a:solidFill>
                   <a:srgbClr val="FFFFFF"/>
                 </a:solidFill>
@@ -4731,7 +4731,7 @@
               </a:rPr>
               <a:t>Según el nivel</a:t>
             </a:r>
-            <a:endParaRPr lang="en-US" sz="1600" dirty="0"/>
+            <a:endParaRPr lang="en-US" sz="1700" dirty="0"/>
           </a:p>
         </p:txBody>
       </p:sp>
@@ -4743,8 +4743,8 @@
         </p:nvSpPr>
         <p:spPr>
           <a:xfrm>
-            <a:off x="1005840" y="3703320"/>
-            <a:ext cx="2834640" cy="731520"/>
+            <a:off x="1078992" y="3703320"/>
+            <a:ext cx="4480560" cy="731520"/>
           </a:xfrm>
           <a:prstGeom prst="rect">
             <a:avLst/>
@@ -4758,12 +4758,12 @@
           <a:p>
             <a:pPr indent="0" marL="0">
               <a:lnSpc>
-                <a:spcPts val="1700"/>
+                <a:spcPts val="1800"/>
               </a:lnSpc>
               <a:buNone/>
             </a:pPr>
             <a:r>
-              <a:rPr lang="en-US" sz="1300" dirty="0">
+              <a:rPr lang="en-US" sz="1350" dirty="0">
                 <a:solidFill>
                   <a:srgbClr val="8E96A8"/>
                 </a:solidFill>
@@ -4771,9 +4771,9 @@
                 <a:ea typeface="Calibri" pitchFamily="34" charset="-122"/>
                 <a:cs typeface="Calibri" pitchFamily="34" charset="-120"/>
               </a:rPr>
-              <a:t>Acertás y sumás los puntos que valga el bloque.</a:t>
-            </a:r>
-            <a:endParaRPr lang="en-US" sz="1300" dirty="0"/>
+              <a:t>Acertás y sumás los puntos que valga el bloque que sacaste.</a:t>
+            </a:r>
+            <a:endParaRPr lang="en-US" sz="1350" dirty="0"/>
           </a:p>
         </p:txBody>
       </p:sp>
@@ -4785,8 +4785,8 @@
         </p:nvSpPr>
         <p:spPr>
           <a:xfrm>
-            <a:off x="4325112" y="2148840"/>
-            <a:ext cx="3383280" cy="2331720"/>
+            <a:off x="6199632" y="2148840"/>
+            <a:ext cx="5257800" cy="2331720"/>
           </a:xfrm>
           <a:prstGeom prst="roundRect">
             <a:avLst>
@@ -4812,24 +4812,24 @@
         </p:nvSpPr>
         <p:spPr>
           <a:xfrm>
-            <a:off x="4617720" y="2395728"/>
-            <a:ext cx="2834640" cy="777240"/>
-          </a:xfrm>
-          <a:prstGeom prst="rect">
-            <a:avLst/>
-          </a:prstGeom>
-          <a:noFill/>
-          <a:ln/>
-        </p:spPr>
-        <p:txBody>
-          <a:bodyPr wrap="square" lIns="0" tIns="0" rIns="0" bIns="0" rtlCol="0" anchor="ctr"/>
-          <a:lstStyle/>
-          <a:p>
-            <a:pPr indent="0" marL="0">
-              <a:buNone/>
-            </a:pPr>
-            <a:r>
-              <a:rPr lang="en-US" sz="4400" b="1" dirty="0">
+            <a:off x="6565392" y="2395728"/>
+            <a:ext cx="4572000" cy="777240"/>
+          </a:xfrm>
+          <a:prstGeom prst="rect">
+            <a:avLst/>
+          </a:prstGeom>
+          <a:noFill/>
+          <a:ln/>
+        </p:spPr>
+        <p:txBody>
+          <a:bodyPr wrap="square" lIns="0" tIns="0" rIns="0" bIns="0" rtlCol="0" anchor="ctr"/>
+          <a:lstStyle/>
+          <a:p>
+            <a:pPr indent="0" marL="0">
+              <a:buNone/>
+            </a:pPr>
+            <a:r>
+              <a:rPr lang="en-US" sz="4600" b="1" dirty="0">
                 <a:solidFill>
                   <a:srgbClr val="FF8A6B"/>
                 </a:solidFill>
@@ -4839,7 +4839,7 @@
               </a:rPr>
               <a:t>−1</a:t>
             </a:r>
-            <a:endParaRPr lang="en-US" sz="4400" dirty="0"/>
+            <a:endParaRPr lang="en-US" sz="4600" dirty="0"/>
           </a:p>
         </p:txBody>
       </p:sp>
@@ -4851,24 +4851,24 @@
         </p:nvSpPr>
         <p:spPr>
           <a:xfrm>
-            <a:off x="4617720" y="3291840"/>
-            <a:ext cx="2834640" cy="365760"/>
-          </a:xfrm>
-          <a:prstGeom prst="rect">
-            <a:avLst/>
-          </a:prstGeom>
-          <a:noFill/>
-          <a:ln/>
-        </p:spPr>
-        <p:txBody>
-          <a:bodyPr wrap="square" lIns="0" tIns="0" rIns="0" bIns="0" rtlCol="0" anchor="ctr"/>
-          <a:lstStyle/>
-          <a:p>
-            <a:pPr indent="0" marL="0">
-              <a:buNone/>
-            </a:pPr>
-            <a:r>
-              <a:rPr lang="en-US" sz="1600" b="1" dirty="0">
+            <a:off x="6565392" y="3291840"/>
+            <a:ext cx="4572000" cy="365760"/>
+          </a:xfrm>
+          <a:prstGeom prst="rect">
+            <a:avLst/>
+          </a:prstGeom>
+          <a:noFill/>
+          <a:ln/>
+        </p:spPr>
+        <p:txBody>
+          <a:bodyPr wrap="square" lIns="0" tIns="0" rIns="0" bIns="0" rtlCol="0" anchor="ctr"/>
+          <a:lstStyle/>
+          <a:p>
+            <a:pPr indent="0" marL="0">
+              <a:buNone/>
+            </a:pPr>
+            <a:r>
+              <a:rPr lang="en-US" sz="1700" b="1" dirty="0">
                 <a:solidFill>
                   <a:srgbClr val="FFFFFF"/>
                 </a:solidFill>
@@ -4878,7 +4878,7 @@
               </a:rPr>
               <a:t>Si errás</a:t>
             </a:r>
-            <a:endParaRPr lang="en-US" sz="1600" dirty="0"/>
+            <a:endParaRPr lang="en-US" sz="1700" dirty="0"/>
           </a:p>
         </p:txBody>
       </p:sp>
@@ -4890,8 +4890,8 @@
         </p:nvSpPr>
         <p:spPr>
           <a:xfrm>
-            <a:off x="4617720" y="3703320"/>
-            <a:ext cx="2834640" cy="731520"/>
+            <a:off x="6565392" y="3703320"/>
+            <a:ext cx="4480560" cy="731520"/>
           </a:xfrm>
           <a:prstGeom prst="rect">
             <a:avLst/>
@@ -4905,12 +4905,12 @@
           <a:p>
             <a:pPr indent="0" marL="0">
               <a:lnSpc>
-                <a:spcPts val="1700"/>
+                <a:spcPts val="1800"/>
               </a:lnSpc>
               <a:buNone/>
             </a:pPr>
             <a:r>
-              <a:rPr lang="en-US" sz="1300" dirty="0">
+              <a:rPr lang="en-US" sz="1350" dirty="0">
                 <a:solidFill>
                   <a:srgbClr val="8E96A8"/>
                 </a:solidFill>
@@ -4918,162 +4918,15 @@
                 <a:ea typeface="Calibri" pitchFamily="34" charset="-122"/>
                 <a:cs typeface="Calibri" pitchFamily="34" charset="-120"/>
               </a:rPr>
-              <a:t>Nunca bajás de cero, pero arriesgar de más cuesta.</a:t>
-            </a:r>
-            <a:endParaRPr lang="en-US" sz="1300" dirty="0"/>
-          </a:p>
-        </p:txBody>
-      </p:sp>
-      <p:sp>
-        <p:nvSpPr>
-          <p:cNvPr id="12" name="Shape 10"/>
-          <p:cNvSpPr/>
-          <p:nvPr/>
-        </p:nvSpPr>
-        <p:spPr>
-          <a:xfrm>
-            <a:off x="7936992" y="2148840"/>
-            <a:ext cx="3383280" cy="2331720"/>
-          </a:xfrm>
-          <a:prstGeom prst="roundRect">
-            <a:avLst>
-              <a:gd name="adj" fmla="val 3137"/>
-            </a:avLst>
-          </a:prstGeom>
-          <a:solidFill>
-            <a:srgbClr val="3A2320"/>
-          </a:solidFill>
-          <a:ln w="12700">
-            <a:solidFill>
-              <a:srgbClr val="3A2320"/>
-            </a:solidFill>
-            <a:prstDash val="solid"/>
-          </a:ln>
-        </p:spPr>
-      </p:sp>
-      <p:sp>
-        <p:nvSpPr>
-          <p:cNvPr id="13" name="Text 11"/>
-          <p:cNvSpPr txBox="1"/>
-          <p:nvPr/>
-        </p:nvSpPr>
-        <p:spPr>
-          <a:xfrm>
-            <a:off x="8229600" y="2395728"/>
-            <a:ext cx="2834640" cy="777240"/>
-          </a:xfrm>
-          <a:prstGeom prst="rect">
-            <a:avLst/>
-          </a:prstGeom>
-          <a:noFill/>
-          <a:ln/>
-        </p:spPr>
-        <p:txBody>
-          <a:bodyPr wrap="square" lIns="0" tIns="0" rIns="0" bIns="0" rtlCol="0" anchor="ctr"/>
-          <a:lstStyle/>
-          <a:p>
-            <a:pPr indent="0" marL="0">
-              <a:buNone/>
-            </a:pPr>
-            <a:r>
-              <a:rPr lang="en-US" sz="4400" b="1" dirty="0">
-                <a:solidFill>
-                  <a:srgbClr val="FF8A6B"/>
-                </a:solidFill>
-                <a:latin typeface="Cambria" pitchFamily="34" charset="0"/>
-                <a:ea typeface="Cambria" pitchFamily="34" charset="-122"/>
-                <a:cs typeface="Cambria" pitchFamily="34" charset="-120"/>
-              </a:rPr>
-              <a:t>+3</a:t>
-            </a:r>
-            <a:endParaRPr lang="en-US" sz="4400" dirty="0"/>
-          </a:p>
-        </p:txBody>
-      </p:sp>
-      <p:sp>
-        <p:nvSpPr>
-          <p:cNvPr id="14" name="Text 12"/>
-          <p:cNvSpPr txBox="1"/>
-          <p:nvPr/>
-        </p:nvSpPr>
-        <p:spPr>
-          <a:xfrm>
-            <a:off x="8229600" y="3291840"/>
-            <a:ext cx="2834640" cy="365760"/>
-          </a:xfrm>
-          <a:prstGeom prst="rect">
-            <a:avLst/>
-          </a:prstGeom>
-          <a:noFill/>
-          <a:ln/>
-        </p:spPr>
-        <p:txBody>
-          <a:bodyPr wrap="square" lIns="0" tIns="0" rIns="0" bIns="0" rtlCol="0" anchor="ctr"/>
-          <a:lstStyle/>
-          <a:p>
-            <a:pPr indent="0" marL="0">
-              <a:buNone/>
-            </a:pPr>
-            <a:r>
-              <a:rPr lang="en-US" sz="1600" b="1" dirty="0">
-                <a:solidFill>
-                  <a:srgbClr val="FFFFFF"/>
-                </a:solidFill>
-                <a:latin typeface="Calibri" pitchFamily="34" charset="0"/>
-                <a:ea typeface="Calibri" pitchFamily="34" charset="-122"/>
-                <a:cs typeface="Calibri" pitchFamily="34" charset="-120"/>
-              </a:rPr>
-              <a:t>Bono de cultura general</a:t>
-            </a:r>
-            <a:endParaRPr lang="en-US" sz="1600" dirty="0"/>
-          </a:p>
-        </p:txBody>
-      </p:sp>
-      <p:sp>
-        <p:nvSpPr>
-          <p:cNvPr id="15" name="Text 13"/>
-          <p:cNvSpPr txBox="1"/>
-          <p:nvPr/>
-        </p:nvSpPr>
-        <p:spPr>
-          <a:xfrm>
-            <a:off x="8229600" y="3703320"/>
-            <a:ext cx="2834640" cy="731520"/>
-          </a:xfrm>
-          <a:prstGeom prst="rect">
-            <a:avLst/>
-          </a:prstGeom>
-          <a:noFill/>
-          <a:ln/>
-        </p:spPr>
-        <p:txBody>
-          <a:bodyPr wrap="square" lIns="0" tIns="0" rIns="0" bIns="0" rtlCol="0" anchor="ctr"/>
-          <a:lstStyle/>
-          <a:p>
-            <a:pPr indent="0" marL="0">
-              <a:lnSpc>
-                <a:spcPts val="1700"/>
-              </a:lnSpc>
-              <a:buNone/>
-            </a:pPr>
-            <a:r>
-              <a:rPr lang="en-US" sz="1300" dirty="0">
-                <a:solidFill>
-                  <a:srgbClr val="8E96A8"/>
-                </a:solidFill>
-                <a:latin typeface="Calibri" pitchFamily="34" charset="0"/>
-                <a:ea typeface="Calibri" pitchFamily="34" charset="-122"/>
-                <a:cs typeface="Calibri" pitchFamily="34" charset="-120"/>
-              </a:rPr>
-              <a:t>La primera vez que acertás una carta de cada materia.</a:t>
-            </a:r>
-            <a:endParaRPr lang="en-US" sz="1300" dirty="0"/>
-          </a:p>
-        </p:txBody>
-      </p:sp>
-      <p:sp>
-        <p:nvSpPr>
-          <p:cNvPr id="16" name="Text 14"/>
+              <a:t>Nunca bajás de cero, pero arriesgar de más te cuesta puntos.</a:t>
+            </a:r>
+            <a:endParaRPr lang="en-US" sz="1350" dirty="0"/>
+          </a:p>
+        </p:txBody>
+      </p:sp>
+      <p:sp>
+        <p:nvSpPr>
+          <p:cNvPr id="12" name="Text 10"/>
           <p:cNvSpPr txBox="1"/>
           <p:nvPr/>
         </p:nvSpPr>
@@ -5107,7 +4960,7 @@
                 <a:ea typeface="Calibri" pitchFamily="34" charset="-122"/>
                 <a:cs typeface="Calibri" pitchFamily="34" charset="-120"/>
               </a:rPr>
-              <a:t>El nivel te da los puntos, errar te los quita y el bono te empuja a salir de tu materia favorita. Y arriba de todo, la torre.</a:t>
+              <a:t>El nivel te da los puntos y errar te los quita. Y arriba de todo, la torre.</a:t>
             </a:r>
             <a:endParaRPr lang="en-US" sz="1600" dirty="0"/>
           </a:p>
